--- a/courses/COLL150-Fall26/Slides/Unit 3 - Synthetic Personhood-v2.pptx
+++ b/courses/COLL150-Fall26/Slides/Unit 3 - Synthetic Personhood-v2.pptx
@@ -12427,7 +12427,7 @@
                 <a:ea typeface="Calibri" pitchFamily="34" charset="-122"/>
                 <a:cs typeface="Calibri" pitchFamily="34" charset="-120"/>
               </a:rPr>
-              <a:t>The geth–quarian arc and EDI, ME2–ME3  ·  1:40–2:50</a:t>
+              <a:t>The geth–quarian arc and EDI, ME2–ME3 </a:t>
             </a:r>
             <a:endParaRPr lang="en-US" sz="1500" dirty="0"/>
           </a:p>
@@ -12496,7 +12496,7 @@
                 <a:ea typeface="Cambria" pitchFamily="34" charset="-122"/>
                 <a:cs typeface="Cambria" pitchFamily="34" charset="-120"/>
               </a:rPr>
-              <a:t>It makes you negotiate with a machine civilization — and quietly grades you on it.</a:t>
+              <a:t>It makes you negotiate with a machine civilization</a:t>
             </a:r>
             <a:endParaRPr lang="en-US" sz="1800" dirty="0"/>
           </a:p>
